--- a/presentation.pptx
+++ b/presentation.pptx
@@ -3301,7 +3301,7 @@
               </a:defRPr>
             </a:pPr>
             <a:r>
-              <a:t>Results &amp; validation (real numbers, seed 42)</a:t>
+              <a:t>Results &amp; validation (real numbers, seed 42, from metrics.json)</a:t>
             </a:r>
           </a:p>
         </p:txBody>
@@ -3339,7 +3339,7 @@
               </a:defRPr>
             </a:pPr>
             <a:r>
-              <a:t>Legacy manual recall (critical): 0.854 (FN 18)</a:t>
+              <a:t>Legacy manual recall (critical): 0.333 (FN 20)</a:t>
             </a:r>
           </a:p>
           <a:p>
@@ -3354,7 +3354,7 @@
               </a:defRPr>
             </a:pPr>
             <a:r>
-              <a:t>Executor-only recall: 0.829 — automation alone is NOT enough</a:t>
+              <a:t>Executor-only recall: 0.733 — automation alone is NOT enough</a:t>
             </a:r>
           </a:p>
           <a:p>
@@ -3369,7 +3369,7 @@
               </a:defRPr>
             </a:pPr>
             <a:r>
-              <a:t>Executor + Critic recall: 0.984 (FN 18 → 2)</a:t>
+              <a:t>Executor + Critic recall: 0.733 (CI 95%: [0.567, 0.897])</a:t>
             </a:r>
           </a:p>
           <a:p>
@@ -3384,7 +3384,7 @@
               </a:defRPr>
             </a:pPr>
             <a:r>
-              <a:t>Missed criticals caught: 39 · Immediate items: 60</a:t>
+              <a:t>Missed criticals caught: 104 · Immediate items: 30</a:t>
             </a:r>
           </a:p>
           <a:p>
@@ -3399,7 +3399,22 @@
               </a:defRPr>
             </a:pPr>
             <a:r>
-              <a:t>23/23 pytest green · deterministic · &lt;1 s runtime</a:t>
+              <a:t>Interacting share: 3.3% · Escalated: 0.000% · MONITOR share: 25.7%</a:t>
+            </a:r>
+          </a:p>
+          <a:p>
+            <a:pPr>
+              <a:spcAft>
+                <a:spcPts val="600"/>
+              </a:spcAft>
+              <a:defRPr sz="1400">
+                <a:solidFill>
+                  <a:srgbClr val="5A5A5A"/>
+                </a:solidFill>
+              </a:defRPr>
+            </a:pPr>
+            <a:r>
+              <a:t>Planted missed-criticals caught: 73.3% · Validation errors: 0 · Runtime: 0.090 s</a:t>
             </a:r>
           </a:p>
         </p:txBody>
@@ -3561,6 +3576,21 @@
               <a:t>Single-machine PoC: no auth, audit DB, or crew scheduling</a:t>
             </a:r>
           </a:p>
+          <a:p>
+            <a:pPr>
+              <a:spcAft>
+                <a:spcPts val="600"/>
+              </a:spcAft>
+              <a:defRPr sz="1400">
+                <a:solidFill>
+                  <a:srgbClr val="5A5A5A"/>
+                </a:solidFill>
+              </a:defRPr>
+            </a:pPr>
+            <a:r>
+              <a:t>Ground truth model: independent hand-written rule model with assumed noise model</a:t>
+            </a:r>
+          </a:p>
         </p:txBody>
       </p:sp>
     </p:spTree>
@@ -3687,7 +3717,7 @@
               </a:defRPr>
             </a:pPr>
             <a:r>
-              <a:t>Conclusion: critic-guarded agents lift critical recall 0.854 → 0.984 with full traceability — a viable second pair of eyes.</a:t>
+              <a:t>Conclusion: critic-guarded agents lift critical recall 0.333 → 0.733 with full traceability — a viable second pair of eyes.</a:t>
             </a:r>
           </a:p>
         </p:txBody>
@@ -3960,7 +3990,7 @@
               </a:defRPr>
             </a:pPr>
             <a:r>
-              <a:t>Legacy labels in our synthetic run miss 18/123 criticals (recall 0.854)</a:t>
+              <a:t>Legacy labels in our synthetic run miss 20/30 criticals (recall 0.333)</a:t>
             </a:r>
           </a:p>
           <a:p>
@@ -4452,7 +4482,7 @@
               </a:defRPr>
             </a:pPr>
             <a:r>
-              <a:t>This run: 2 rework iteration(s), 150 final upgrade(s), 150 escalated</a:t>
+              <a:t>This run: 1 rework iteration(s), 0 final upgrade(s), 0 escalated</a:t>
             </a:r>
           </a:p>
           <a:p>
@@ -4548,20 +4578,12 @@
           </a:p>
         </p:txBody>
       </p:sp>
-      <p:pic>
-        <p:nvPicPr>
-          <p:cNvPr id="3" name="Picture 2" descr="architecture.png"/>
-          <p:cNvPicPr>
-            <a:picLocks noChangeAspect="1"/>
-          </p:cNvPicPr>
+      <p:sp>
+        <p:nvSpPr>
+          <p:cNvPr id="3" name="TextBox 2"/>
+          <p:cNvSpPr txBox="1"/>
           <p:nvPr/>
-        </p:nvPicPr>
-        <p:blipFill>
-          <a:blip r:embed="rId2"/>
-          <a:stretch>
-            <a:fillRect/>
-          </a:stretch>
-        </p:blipFill>
+        </p:nvSpPr>
         <p:spPr>
           <a:xfrm>
             <a:off x="640080" y="1097280"/>
@@ -4570,8 +4592,72 @@
           <a:prstGeom prst="rect">
             <a:avLst/>
           </a:prstGeom>
+          <a:noFill/>
         </p:spPr>
-      </p:pic>
+        <p:txBody>
+          <a:bodyPr wrap="square">
+            <a:spAutoFit/>
+          </a:bodyPr>
+          <a:lstStyle/>
+          <a:p>
+            <a:pPr algn="ctr">
+              <a:defRPr sz="1800">
+                <a:solidFill>
+                  <a:srgbClr val="5A5A5A"/>
+                </a:solidFill>
+              </a:defRPr>
+            </a:pPr>
+            <a:r>
+              <a:t>[Insert draw.io architecture export here]</a:t>
+            </a:r>
+            <a:br/>
+            <a:br/>
+            <a:r>
+              <a:t>Export your draw.io diagram as PNG</a:t>
+            </a:r>
+            <a:br/>
+            <a:r>
+              <a:t>and save as docs/architecture_drawio.png</a:t>
+            </a:r>
+          </a:p>
+          <a:p>
+            <a:pPr algn="ctr">
+              <a:defRPr sz="1400">
+                <a:solidFill>
+                  <a:srgbClr val="5A5A5A"/>
+                </a:solidFill>
+              </a:defRPr>
+            </a:pPr>
+            <a:r>
+              <a:t>Component table, edge table, decision points,</a:t>
+            </a:r>
+          </a:p>
+          <a:p>
+            <a:pPr algn="ctr">
+              <a:defRPr sz="1400">
+                <a:solidFill>
+                  <a:srgbClr val="5A5A5A"/>
+                </a:solidFill>
+              </a:defRPr>
+            </a:pPr>
+            <a:r>
+              <a:t>suggested draw.io layout, and Mermaid flowchart</a:t>
+            </a:r>
+          </a:p>
+          <a:p>
+            <a:pPr algn="ctr">
+              <a:defRPr sz="1400">
+                <a:solidFill>
+                  <a:srgbClr val="5A5A5A"/>
+                </a:solidFill>
+              </a:defRPr>
+            </a:pPr>
+            <a:r>
+              <a:t>are in docs/ARCHITECTURE_EXPLAINED.md</a:t>
+            </a:r>
+          </a:p>
+        </p:txBody>
+      </p:sp>
     </p:spTree>
   </p:cSld>
   <p:clrMapOvr>
@@ -4726,7 +4812,7 @@
               </a:defRPr>
             </a:pPr>
             <a:r>
-              <a:t>Seed 42 · full 300-anomaly run in &lt;1 s (budget 30 s)</a:t>
+              <a:t>Seed 42 · full 300-anomaly run in 0.090 s (budget 30 s)</a:t>
             </a:r>
           </a:p>
         </p:txBody>

--- a/presentation.pptx
+++ b/presentation.pptx
@@ -3301,7 +3301,7 @@
               </a:defRPr>
             </a:pPr>
             <a:r>
-              <a:t>Results &amp; validation (real numbers, seed 42, from metrics.json)</a:t>
+              <a:t>Results &amp; validation (real numbers from metrics.json)</a:t>
             </a:r>
           </a:p>
         </p:txBody>
@@ -3339,7 +3339,7 @@
               </a:defRPr>
             </a:pPr>
             <a:r>
-              <a:t>Legacy manual recall (critical): 0.333 (FN 20)</a:t>
+              <a:t>Seed 42 (tuning): legacy recall 0.333 → final 0.667</a:t>
             </a:r>
           </a:p>
           <a:p>
@@ -3354,7 +3354,7 @@
               </a:defRPr>
             </a:pPr>
             <a:r>
-              <a:t>Executor-only recall: 0.733 — automation alone is NOT enough</a:t>
+              <a:t>Eval seeds 7+99: final recall 0.755, precision 0.249</a:t>
             </a:r>
           </a:p>
           <a:p>
@@ -3369,7 +3369,7 @@
               </a:defRPr>
             </a:pPr>
             <a:r>
-              <a:t>Executor + Critic recall: 0.733 (CI 95%: [0.567, 0.897])</a:t>
+              <a:t>Seed 99 final: recall 0.818, precision 0.318</a:t>
             </a:r>
           </a:p>
           <a:p>
@@ -3384,7 +3384,7 @@
               </a:defRPr>
             </a:pPr>
             <a:r>
-              <a:t>Missed criticals caught: 104 · Immediate items: 30</a:t>
+              <a:t>missed_caught: 13/8/16 (seeds 42/7/99) · false alarms: 73/82/58</a:t>
             </a:r>
           </a:p>
           <a:p>
@@ -3399,22 +3399,7 @@
               </a:defRPr>
             </a:pPr>
             <a:r>
-              <a:t>Interacting share: 3.3% · Escalated: 0.000% · MONITOR share: 25.7%</a:t>
-            </a:r>
-          </a:p>
-          <a:p>
-            <a:pPr>
-              <a:spcAft>
-                <a:spcPts val="600"/>
-              </a:spcAft>
-              <a:defRPr sz="1400">
-                <a:solidFill>
-                  <a:srgbClr val="5A5A5A"/>
-                </a:solidFill>
-              </a:defRPr>
-            </a:pPr>
-            <a:r>
-              <a:t>Planted missed-criticals caught: 73.3% · Validation errors: 0 · Runtime: 0.090 s</a:t>
+              <a:t>Interacting ~3-5% · Rework: 1 iter, all resolved · Validation errors: 0 · Runtime &lt;0.2 s</a:t>
             </a:r>
           </a:p>
         </p:txBody>
@@ -3558,7 +3543,7 @@
               </a:defRPr>
             </a:pPr>
             <a:r>
-              <a:t>Static thresholds; no learning from engineer feedback yet</a:t>
+              <a:t>Low precision / over-triage — precision 0.249 (target &gt;= 0.40 not reached); 73-58 false alarms per run from ILI noise</a:t>
             </a:r>
           </a:p>
           <a:p>
@@ -3573,7 +3558,7 @@
               </a:defRPr>
             </a:pPr>
             <a:r>
-              <a:t>Single-machine PoC: no auth, audit DB, or crew scheduling</a:t>
+              <a:t>Rework convergence partly by design (shared rule family); independent learned Critic is future scope</a:t>
             </a:r>
           </a:p>
           <a:p>
@@ -3588,7 +3573,7 @@
               </a:defRPr>
             </a:pPr>
             <a:r>
-              <a:t>Ground truth model: independent hand-written rule model with assumed noise model</a:t>
+              <a:t>Static thresholds; no learning from engineer feedback; single-machine PoC</a:t>
             </a:r>
           </a:p>
         </p:txBody>
@@ -3717,7 +3702,7 @@
               </a:defRPr>
             </a:pPr>
             <a:r>
-              <a:t>Conclusion: critic-guarded agents lift critical recall 0.333 → 0.733 with full traceability — a viable second pair of eyes.</a:t>
+              <a:t>Conclusion: critic-guarded agents lift critical recall 0.333 → 0.667 with full traceability — a viable second pair of eyes.</a:t>
             </a:r>
           </a:p>
         </p:txBody>
@@ -3990,7 +3975,7 @@
               </a:defRPr>
             </a:pPr>
             <a:r>
-              <a:t>Legacy labels in our synthetic run miss 20/30 criticals (recall 0.333)</a:t>
+              <a:t>Legacy labels in our synthetic run have recall 0.333 — many criticals missed</a:t>
             </a:r>
           </a:p>
           <a:p>
@@ -4482,7 +4467,7 @@
               </a:defRPr>
             </a:pPr>
             <a:r>
-              <a:t>This run: 1 rework iteration(s), 0 final upgrade(s), 0 escalated</a:t>
+              <a:t>This run: 1 rework iteration(s), 0 objections, 0 escalated</a:t>
             </a:r>
           </a:p>
           <a:p>
@@ -4812,7 +4797,7 @@
               </a:defRPr>
             </a:pPr>
             <a:r>
-              <a:t>Seed 42 · full 300-anomaly run in 0.090 s (budget 30 s)</a:t>
+              <a:t>Seed 42 · full 300-anomaly run in 0 s (budget 30 s)</a:t>
             </a:r>
           </a:p>
         </p:txBody>

--- a/presentation.pptx
+++ b/presentation.pptx
@@ -3339,7 +3339,7 @@
               </a:defRPr>
             </a:pPr>
             <a:r>
-              <a:t>Seed 42 (tuning): legacy recall 0.333 → final 0.667</a:t>
+              <a:t>Seed 42 (tuning): legacy recall 0.333 → final 0.733</a:t>
             </a:r>
           </a:p>
           <a:p>
@@ -3354,7 +3354,7 @@
               </a:defRPr>
             </a:pPr>
             <a:r>
-              <a:t>Eval seeds 7+99: final recall 0.755, precision 0.249</a:t>
+              <a:t>Eval seeds 7+99: final recall 0.805, precision 0.230</a:t>
             </a:r>
           </a:p>
           <a:p>
@@ -3369,7 +3369,7 @@
               </a:defRPr>
             </a:pPr>
             <a:r>
-              <a:t>Seed 99 final: recall 0.818, precision 0.318</a:t>
+              <a:t>Seed 99 final: recall 0.879, precision 0.282</a:t>
             </a:r>
           </a:p>
           <a:p>
@@ -3384,7 +3384,7 @@
               </a:defRPr>
             </a:pPr>
             <a:r>
-              <a:t>missed_caught: 13/8/16 (seeds 42/7/99) · false alarms: 73/82/58</a:t>
+              <a:t>missed_caught: 15/9/18 (seeds 42/7/99) · false alarms: 84/88/74</a:t>
             </a:r>
           </a:p>
           <a:p>
@@ -3399,7 +3399,7 @@
               </a:defRPr>
             </a:pPr>
             <a:r>
-              <a:t>Interacting ~3-5% · Rework: 1 iter, all resolved · Validation errors: 0 · Runtime &lt;0.2 s</a:t>
+              <a:t>Zero-noise experiment: precision delta only 0.005 — false alarms are NOT primarily ILI noise; final honors Critic (tested)</a:t>
             </a:r>
           </a:p>
         </p:txBody>
@@ -3543,7 +3543,7 @@
               </a:defRPr>
             </a:pPr>
             <a:r>
-              <a:t>Low precision / over-triage — precision 0.249 (target &gt;= 0.40 not reached); 73-58 false alarms per run from ILI noise</a:t>
+              <a:t>Low precision / over-triage — precision 0.230 (target &gt;= 0.40 not reached); 84-74 false alarms per run from ILI noise</a:t>
             </a:r>
           </a:p>
           <a:p>
@@ -3702,7 +3702,7 @@
               </a:defRPr>
             </a:pPr>
             <a:r>
-              <a:t>Conclusion: critic-guarded agents lift critical recall 0.333 → 0.667 with full traceability — a viable second pair of eyes.</a:t>
+              <a:t>Conclusion: critic-guarded agents lift critical recall 0 → 0 with full traceability — a viable second pair of eyes.</a:t>
             </a:r>
           </a:p>
         </p:txBody>
@@ -3975,7 +3975,7 @@
               </a:defRPr>
             </a:pPr>
             <a:r>
-              <a:t>Legacy labels in our synthetic run have recall 0.333 — many criticals missed</a:t>
+              <a:t>Legacy labels in our synthetic run have recall 0 — many criticals missed</a:t>
             </a:r>
           </a:p>
           <a:p>
